--- a/slides/2-8_eeg_awareness/2-8_eeg_awareness.pptx
+++ b/slides/2-8_eeg_awareness/2-8_eeg_awareness.pptx
@@ -2266,7 +2266,7 @@
           <a:ln/>
         </p:spPr>
         <p:txBody>
-          <a:bodyPr wrap="square" lIns="0" tIns="0" rIns="0" bIns="0" rtlCol="0" anchor="ctr"/>
+          <a:bodyPr wrap="none" lIns="0" tIns="0" rIns="0" bIns="0" rtlCol="0" anchor="ctr"/>
           <a:lstStyle/>
           <a:p>
             <a:pPr algn="ctr" indent="0" marL="0">
@@ -2309,7 +2309,7 @@
           <a:ln/>
         </p:spPr>
         <p:txBody>
-          <a:bodyPr wrap="square" lIns="0" tIns="0" rIns="0" bIns="0" rtlCol="0" anchor="ctr"/>
+          <a:bodyPr wrap="none" lIns="0" tIns="0" rIns="0" bIns="0" rtlCol="0" anchor="ctr"/>
           <a:lstStyle/>
           <a:p>
             <a:pPr algn="ctr" indent="0" marL="0">
@@ -2352,7 +2352,7 @@
           <a:ln/>
         </p:spPr>
         <p:txBody>
-          <a:bodyPr wrap="square" lIns="0" tIns="0" rIns="0" bIns="0" rtlCol="0" anchor="ctr"/>
+          <a:bodyPr wrap="none" lIns="0" tIns="0" rIns="0" bIns="0" rtlCol="0" anchor="ctr"/>
           <a:lstStyle/>
           <a:p>
             <a:pPr algn="ctr" indent="0" marL="0">
@@ -2395,7 +2395,7 @@
           <a:ln/>
         </p:spPr>
         <p:txBody>
-          <a:bodyPr wrap="square" lIns="0" tIns="0" rIns="0" bIns="0" rtlCol="0" anchor="ctr"/>
+          <a:bodyPr wrap="none" lIns="0" tIns="0" rIns="0" bIns="0" rtlCol="0" anchor="ctr"/>
           <a:lstStyle/>
           <a:p>
             <a:pPr algn="ctr" indent="0" marL="0">
@@ -2438,7 +2438,7 @@
           <a:ln/>
         </p:spPr>
         <p:txBody>
-          <a:bodyPr wrap="square" lIns="0" tIns="0" rIns="0" bIns="0" rtlCol="0" anchor="ctr"/>
+          <a:bodyPr wrap="none" lIns="0" tIns="0" rIns="0" bIns="0" rtlCol="0" anchor="ctr"/>
           <a:lstStyle/>
           <a:p>
             <a:pPr algn="ctr" indent="0" marL="0">
@@ -2821,7 +2821,7 @@
           <a:ln/>
         </p:spPr>
         <p:txBody>
-          <a:bodyPr wrap="square" lIns="0" tIns="0" rIns="0" bIns="0" rtlCol="0" anchor="ctr"/>
+          <a:bodyPr wrap="none" lIns="0" tIns="0" rIns="0" bIns="0" rtlCol="0" anchor="ctr"/>
           <a:lstStyle/>
           <a:p>
             <a:pPr algn="ctr" indent="0" marL="0">
@@ -2864,7 +2864,7 @@
           <a:ln/>
         </p:spPr>
         <p:txBody>
-          <a:bodyPr wrap="square" lIns="0" tIns="0" rIns="0" bIns="0" rtlCol="0" anchor="ctr"/>
+          <a:bodyPr wrap="none" lIns="0" tIns="0" rIns="0" bIns="0" rtlCol="0" anchor="ctr"/>
           <a:lstStyle/>
           <a:p>
             <a:pPr algn="ctr" indent="0" marL="0">
@@ -2907,7 +2907,7 @@
           <a:ln/>
         </p:spPr>
         <p:txBody>
-          <a:bodyPr wrap="square" lIns="0" tIns="0" rIns="0" bIns="0" rtlCol="0" anchor="ctr"/>
+          <a:bodyPr wrap="none" lIns="0" tIns="0" rIns="0" bIns="0" rtlCol="0" anchor="ctr"/>
           <a:lstStyle/>
           <a:p>
             <a:pPr algn="ctr" indent="0" marL="0">
@@ -2950,7 +2950,7 @@
           <a:ln/>
         </p:spPr>
         <p:txBody>
-          <a:bodyPr wrap="square" lIns="0" tIns="0" rIns="0" bIns="0" rtlCol="0" anchor="ctr"/>
+          <a:bodyPr wrap="none" lIns="0" tIns="0" rIns="0" bIns="0" rtlCol="0" anchor="ctr"/>
           <a:lstStyle/>
           <a:p>
             <a:pPr algn="ctr" indent="0" marL="0">
@@ -2993,7 +2993,7 @@
           <a:ln/>
         </p:spPr>
         <p:txBody>
-          <a:bodyPr wrap="square" lIns="0" tIns="0" rIns="0" bIns="0" rtlCol="0" anchor="ctr"/>
+          <a:bodyPr wrap="none" lIns="0" tIns="0" rIns="0" bIns="0" rtlCol="0" anchor="ctr"/>
           <a:lstStyle/>
           <a:p>
             <a:pPr algn="ctr" indent="0" marL="0">
@@ -3732,7 +3732,7 @@
           <a:ln/>
         </p:spPr>
         <p:txBody>
-          <a:bodyPr wrap="square" lIns="0" tIns="0" rIns="0" bIns="0" rtlCol="0" anchor="ctr"/>
+          <a:bodyPr wrap="none" lIns="0" tIns="0" rIns="0" bIns="0" rtlCol="0" anchor="ctr"/>
           <a:lstStyle/>
           <a:p>
             <a:pPr algn="ctr" indent="0" marL="0">
@@ -3775,7 +3775,7 @@
           <a:ln/>
         </p:spPr>
         <p:txBody>
-          <a:bodyPr wrap="square" lIns="0" tIns="0" rIns="0" bIns="0" rtlCol="0" anchor="ctr"/>
+          <a:bodyPr wrap="none" lIns="0" tIns="0" rIns="0" bIns="0" rtlCol="0" anchor="ctr"/>
           <a:lstStyle/>
           <a:p>
             <a:pPr algn="ctr" indent="0" marL="0">
@@ -3818,7 +3818,7 @@
           <a:ln/>
         </p:spPr>
         <p:txBody>
-          <a:bodyPr wrap="square" lIns="0" tIns="0" rIns="0" bIns="0" rtlCol="0" anchor="ctr"/>
+          <a:bodyPr wrap="none" lIns="0" tIns="0" rIns="0" bIns="0" rtlCol="0" anchor="ctr"/>
           <a:lstStyle/>
           <a:p>
             <a:pPr algn="ctr" indent="0" marL="0">
@@ -3861,7 +3861,7 @@
           <a:ln/>
         </p:spPr>
         <p:txBody>
-          <a:bodyPr wrap="square" lIns="0" tIns="0" rIns="0" bIns="0" rtlCol="0" anchor="ctr"/>
+          <a:bodyPr wrap="none" lIns="0" tIns="0" rIns="0" bIns="0" rtlCol="0" anchor="ctr"/>
           <a:lstStyle/>
           <a:p>
             <a:pPr algn="ctr" indent="0" marL="0">
@@ -3904,7 +3904,7 @@
           <a:ln/>
         </p:spPr>
         <p:txBody>
-          <a:bodyPr wrap="square" lIns="0" tIns="0" rIns="0" bIns="0" rtlCol="0" anchor="ctr"/>
+          <a:bodyPr wrap="none" lIns="0" tIns="0" rIns="0" bIns="0" rtlCol="0" anchor="ctr"/>
           <a:lstStyle/>
           <a:p>
             <a:pPr algn="ctr" indent="0" marL="0">
@@ -4689,7 +4689,7 @@
           <a:ln/>
         </p:spPr>
         <p:txBody>
-          <a:bodyPr wrap="square" lIns="0" tIns="0" rIns="0" bIns="0" rtlCol="0" anchor="ctr"/>
+          <a:bodyPr wrap="none" lIns="0" tIns="0" rIns="0" bIns="0" rtlCol="0" anchor="ctr"/>
           <a:lstStyle/>
           <a:p>
             <a:pPr algn="ctr" indent="0" marL="0">
@@ -4732,7 +4732,7 @@
           <a:ln/>
         </p:spPr>
         <p:txBody>
-          <a:bodyPr wrap="square" lIns="0" tIns="0" rIns="0" bIns="0" rtlCol="0" anchor="ctr"/>
+          <a:bodyPr wrap="none" lIns="0" tIns="0" rIns="0" bIns="0" rtlCol="0" anchor="ctr"/>
           <a:lstStyle/>
           <a:p>
             <a:pPr algn="ctr" indent="0" marL="0">
@@ -4775,7 +4775,7 @@
           <a:ln/>
         </p:spPr>
         <p:txBody>
-          <a:bodyPr wrap="square" lIns="0" tIns="0" rIns="0" bIns="0" rtlCol="0" anchor="ctr"/>
+          <a:bodyPr wrap="none" lIns="0" tIns="0" rIns="0" bIns="0" rtlCol="0" anchor="ctr"/>
           <a:lstStyle/>
           <a:p>
             <a:pPr algn="ctr" indent="0" marL="0">
@@ -4818,7 +4818,7 @@
           <a:ln/>
         </p:spPr>
         <p:txBody>
-          <a:bodyPr wrap="square" lIns="0" tIns="0" rIns="0" bIns="0" rtlCol="0" anchor="ctr"/>
+          <a:bodyPr wrap="none" lIns="0" tIns="0" rIns="0" bIns="0" rtlCol="0" anchor="ctr"/>
           <a:lstStyle/>
           <a:p>
             <a:pPr algn="ctr" indent="0" marL="0">
@@ -4861,7 +4861,7 @@
           <a:ln/>
         </p:spPr>
         <p:txBody>
-          <a:bodyPr wrap="square" lIns="0" tIns="0" rIns="0" bIns="0" rtlCol="0" anchor="ctr"/>
+          <a:bodyPr wrap="none" lIns="0" tIns="0" rIns="0" bIns="0" rtlCol="0" anchor="ctr"/>
           <a:lstStyle/>
           <a:p>
             <a:pPr algn="ctr" indent="0" marL="0">
@@ -10944,7 +10944,7 @@
           <a:ln/>
         </p:spPr>
         <p:txBody>
-          <a:bodyPr wrap="square" lIns="0" tIns="0" rIns="0" bIns="0" rtlCol="0" anchor="ctr"/>
+          <a:bodyPr wrap="none" lIns="0" tIns="0" rIns="0" bIns="0" rtlCol="0" anchor="ctr"/>
           <a:lstStyle/>
           <a:p>
             <a:pPr algn="ctr" indent="0" marL="0">
@@ -10987,7 +10987,7 @@
           <a:ln/>
         </p:spPr>
         <p:txBody>
-          <a:bodyPr wrap="square" lIns="0" tIns="0" rIns="0" bIns="0" rtlCol="0" anchor="ctr"/>
+          <a:bodyPr wrap="none" lIns="0" tIns="0" rIns="0" bIns="0" rtlCol="0" anchor="ctr"/>
           <a:lstStyle/>
           <a:p>
             <a:pPr algn="ctr" indent="0" marL="0">
@@ -11030,7 +11030,7 @@
           <a:ln/>
         </p:spPr>
         <p:txBody>
-          <a:bodyPr wrap="square" lIns="0" tIns="0" rIns="0" bIns="0" rtlCol="0" anchor="ctr"/>
+          <a:bodyPr wrap="none" lIns="0" tIns="0" rIns="0" bIns="0" rtlCol="0" anchor="ctr"/>
           <a:lstStyle/>
           <a:p>
             <a:pPr algn="ctr" indent="0" marL="0">
@@ -11073,7 +11073,7 @@
           <a:ln/>
         </p:spPr>
         <p:txBody>
-          <a:bodyPr wrap="square" lIns="0" tIns="0" rIns="0" bIns="0" rtlCol="0" anchor="ctr"/>
+          <a:bodyPr wrap="none" lIns="0" tIns="0" rIns="0" bIns="0" rtlCol="0" anchor="ctr"/>
           <a:lstStyle/>
           <a:p>
             <a:pPr algn="ctr" indent="0" marL="0">
@@ -11116,7 +11116,7 @@
           <a:ln/>
         </p:spPr>
         <p:txBody>
-          <a:bodyPr wrap="square" lIns="0" tIns="0" rIns="0" bIns="0" rtlCol="0" anchor="ctr"/>
+          <a:bodyPr wrap="none" lIns="0" tIns="0" rIns="0" bIns="0" rtlCol="0" anchor="ctr"/>
           <a:lstStyle/>
           <a:p>
             <a:pPr algn="ctr" indent="0" marL="0">
@@ -11982,7 +11982,7 @@
           <a:ln/>
         </p:spPr>
         <p:txBody>
-          <a:bodyPr wrap="square" lIns="0" tIns="0" rIns="0" bIns="0" rtlCol="0" anchor="ctr"/>
+          <a:bodyPr wrap="none" lIns="0" tIns="0" rIns="0" bIns="0" rtlCol="0" anchor="ctr"/>
           <a:lstStyle/>
           <a:p>
             <a:pPr algn="ctr" indent="0" marL="0">
@@ -12025,7 +12025,7 @@
           <a:ln/>
         </p:spPr>
         <p:txBody>
-          <a:bodyPr wrap="square" lIns="0" tIns="0" rIns="0" bIns="0" rtlCol="0" anchor="ctr"/>
+          <a:bodyPr wrap="none" lIns="0" tIns="0" rIns="0" bIns="0" rtlCol="0" anchor="ctr"/>
           <a:lstStyle/>
           <a:p>
             <a:pPr algn="ctr" indent="0" marL="0">
@@ -12068,7 +12068,7 @@
           <a:ln/>
         </p:spPr>
         <p:txBody>
-          <a:bodyPr wrap="square" lIns="0" tIns="0" rIns="0" bIns="0" rtlCol="0" anchor="ctr"/>
+          <a:bodyPr wrap="none" lIns="0" tIns="0" rIns="0" bIns="0" rtlCol="0" anchor="ctr"/>
           <a:lstStyle/>
           <a:p>
             <a:pPr algn="ctr" indent="0" marL="0">
@@ -12111,7 +12111,7 @@
           <a:ln/>
         </p:spPr>
         <p:txBody>
-          <a:bodyPr wrap="square" lIns="0" tIns="0" rIns="0" bIns="0" rtlCol="0" anchor="ctr"/>
+          <a:bodyPr wrap="none" lIns="0" tIns="0" rIns="0" bIns="0" rtlCol="0" anchor="ctr"/>
           <a:lstStyle/>
           <a:p>
             <a:pPr algn="ctr" indent="0" marL="0">
@@ -12154,7 +12154,7 @@
           <a:ln/>
         </p:spPr>
         <p:txBody>
-          <a:bodyPr wrap="square" lIns="0" tIns="0" rIns="0" bIns="0" rtlCol="0" anchor="ctr"/>
+          <a:bodyPr wrap="none" lIns="0" tIns="0" rIns="0" bIns="0" rtlCol="0" anchor="ctr"/>
           <a:lstStyle/>
           <a:p>
             <a:pPr algn="ctr" indent="0" marL="0">
@@ -12822,7 +12822,7 @@
           <a:ln/>
         </p:spPr>
         <p:txBody>
-          <a:bodyPr wrap="square" lIns="0" tIns="0" rIns="0" bIns="0" rtlCol="0" anchor="ctr"/>
+          <a:bodyPr wrap="none" lIns="0" tIns="0" rIns="0" bIns="0" rtlCol="0" anchor="ctr"/>
           <a:lstStyle/>
           <a:p>
             <a:pPr algn="ctr" indent="0" marL="0">
@@ -12865,7 +12865,7 @@
           <a:ln/>
         </p:spPr>
         <p:txBody>
-          <a:bodyPr wrap="square" lIns="0" tIns="0" rIns="0" bIns="0" rtlCol="0" anchor="ctr"/>
+          <a:bodyPr wrap="none" lIns="0" tIns="0" rIns="0" bIns="0" rtlCol="0" anchor="ctr"/>
           <a:lstStyle/>
           <a:p>
             <a:pPr algn="ctr" indent="0" marL="0">
@@ -12908,7 +12908,7 @@
           <a:ln/>
         </p:spPr>
         <p:txBody>
-          <a:bodyPr wrap="square" lIns="0" tIns="0" rIns="0" bIns="0" rtlCol="0" anchor="ctr"/>
+          <a:bodyPr wrap="none" lIns="0" tIns="0" rIns="0" bIns="0" rtlCol="0" anchor="ctr"/>
           <a:lstStyle/>
           <a:p>
             <a:pPr algn="ctr" indent="0" marL="0">
@@ -12951,7 +12951,7 @@
           <a:ln/>
         </p:spPr>
         <p:txBody>
-          <a:bodyPr wrap="square" lIns="0" tIns="0" rIns="0" bIns="0" rtlCol="0" anchor="ctr"/>
+          <a:bodyPr wrap="none" lIns="0" tIns="0" rIns="0" bIns="0" rtlCol="0" anchor="ctr"/>
           <a:lstStyle/>
           <a:p>
             <a:pPr algn="ctr" indent="0" marL="0">
@@ -12994,7 +12994,7 @@
           <a:ln/>
         </p:spPr>
         <p:txBody>
-          <a:bodyPr wrap="square" lIns="0" tIns="0" rIns="0" bIns="0" rtlCol="0" anchor="ctr"/>
+          <a:bodyPr wrap="none" lIns="0" tIns="0" rIns="0" bIns="0" rtlCol="0" anchor="ctr"/>
           <a:lstStyle/>
           <a:p>
             <a:pPr algn="ctr" indent="0" marL="0">
@@ -13517,7 +13517,7 @@
           <a:ln/>
         </p:spPr>
         <p:txBody>
-          <a:bodyPr wrap="square" lIns="0" tIns="0" rIns="0" bIns="0" rtlCol="0" anchor="ctr"/>
+          <a:bodyPr wrap="none" lIns="0" tIns="0" rIns="0" bIns="0" rtlCol="0" anchor="ctr"/>
           <a:lstStyle/>
           <a:p>
             <a:pPr algn="ctr" indent="0" marL="0">
@@ -13560,7 +13560,7 @@
           <a:ln/>
         </p:spPr>
         <p:txBody>
-          <a:bodyPr wrap="square" lIns="0" tIns="0" rIns="0" bIns="0" rtlCol="0" anchor="ctr"/>
+          <a:bodyPr wrap="none" lIns="0" tIns="0" rIns="0" bIns="0" rtlCol="0" anchor="ctr"/>
           <a:lstStyle/>
           <a:p>
             <a:pPr algn="ctr" indent="0" marL="0">
@@ -13603,7 +13603,7 @@
           <a:ln/>
         </p:spPr>
         <p:txBody>
-          <a:bodyPr wrap="square" lIns="0" tIns="0" rIns="0" bIns="0" rtlCol="0" anchor="ctr"/>
+          <a:bodyPr wrap="none" lIns="0" tIns="0" rIns="0" bIns="0" rtlCol="0" anchor="ctr"/>
           <a:lstStyle/>
           <a:p>
             <a:pPr algn="ctr" indent="0" marL="0">
@@ -13646,7 +13646,7 @@
           <a:ln/>
         </p:spPr>
         <p:txBody>
-          <a:bodyPr wrap="square" lIns="0" tIns="0" rIns="0" bIns="0" rtlCol="0" anchor="ctr"/>
+          <a:bodyPr wrap="none" lIns="0" tIns="0" rIns="0" bIns="0" rtlCol="0" anchor="ctr"/>
           <a:lstStyle/>
           <a:p>
             <a:pPr algn="ctr" indent="0" marL="0">
@@ -13689,7 +13689,7 @@
           <a:ln/>
         </p:spPr>
         <p:txBody>
-          <a:bodyPr wrap="square" lIns="0" tIns="0" rIns="0" bIns="0" rtlCol="0" anchor="ctr"/>
+          <a:bodyPr wrap="none" lIns="0" tIns="0" rIns="0" bIns="0" rtlCol="0" anchor="ctr"/>
           <a:lstStyle/>
           <a:p>
             <a:pPr algn="ctr" indent="0" marL="0">
@@ -14396,7 +14396,7 @@
           <a:ln/>
         </p:spPr>
         <p:txBody>
-          <a:bodyPr wrap="square" lIns="0" tIns="0" rIns="0" bIns="0" rtlCol="0" anchor="ctr"/>
+          <a:bodyPr wrap="none" lIns="0" tIns="0" rIns="0" bIns="0" rtlCol="0" anchor="ctr"/>
           <a:lstStyle/>
           <a:p>
             <a:pPr algn="ctr" indent="0" marL="0">
@@ -14439,7 +14439,7 @@
           <a:ln/>
         </p:spPr>
         <p:txBody>
-          <a:bodyPr wrap="square" lIns="0" tIns="0" rIns="0" bIns="0" rtlCol="0" anchor="ctr"/>
+          <a:bodyPr wrap="none" lIns="0" tIns="0" rIns="0" bIns="0" rtlCol="0" anchor="ctr"/>
           <a:lstStyle/>
           <a:p>
             <a:pPr algn="ctr" indent="0" marL="0">
@@ -14482,7 +14482,7 @@
           <a:ln/>
         </p:spPr>
         <p:txBody>
-          <a:bodyPr wrap="square" lIns="0" tIns="0" rIns="0" bIns="0" rtlCol="0" anchor="ctr"/>
+          <a:bodyPr wrap="none" lIns="0" tIns="0" rIns="0" bIns="0" rtlCol="0" anchor="ctr"/>
           <a:lstStyle/>
           <a:p>
             <a:pPr algn="ctr" indent="0" marL="0">
@@ -14525,7 +14525,7 @@
           <a:ln/>
         </p:spPr>
         <p:txBody>
-          <a:bodyPr wrap="square" lIns="0" tIns="0" rIns="0" bIns="0" rtlCol="0" anchor="ctr"/>
+          <a:bodyPr wrap="none" lIns="0" tIns="0" rIns="0" bIns="0" rtlCol="0" anchor="ctr"/>
           <a:lstStyle/>
           <a:p>
             <a:pPr algn="ctr" indent="0" marL="0">
@@ -14568,7 +14568,7 @@
           <a:ln/>
         </p:spPr>
         <p:txBody>
-          <a:bodyPr wrap="square" lIns="0" tIns="0" rIns="0" bIns="0" rtlCol="0" anchor="ctr"/>
+          <a:bodyPr wrap="none" lIns="0" tIns="0" rIns="0" bIns="0" rtlCol="0" anchor="ctr"/>
           <a:lstStyle/>
           <a:p>
             <a:pPr algn="ctr" indent="0" marL="0">
